--- a/submission/AISD-presentation/HPRTAS - Second Release.pptx
+++ b/submission/AISD-presentation/HPRTAS - Second Release.pptx
@@ -4294,7 +4294,7 @@
         </p:nvGraphicFramePr>
         <p:xfrm>
           <a:off x="566928" y="1024128"/>
-          <a:ext cx="11064240" cy="5486400"/>
+          <a:ext cx="11064240" cy="4572000"/>
         </p:xfrm>
         <a:graphic>
           <a:graphicData uri="http://schemas.openxmlformats.org/drawingml/2006/table">
@@ -4657,7 +4657,7 @@
                           </a:solidFill>
                           <a:latin typeface="Segoe UI"/>
                         </a:rPr>
-                        <a:t>affectsCharge as a guard</a:t>
+                        <a:t>GP registry validation; multi-instance cardinality; a GP-side rejection</a:t>
                       </a:r>
                     </a:p>
                   </a:txBody>
@@ -4684,7 +4684,7 @@
                           </a:solidFill>
                           <a:latin typeface="Segoe UI"/>
                         </a:rPr>
-                        <a:t>A condition on an activity's only outgoing flow is never evaluated by Camunda; enforcing it needs a gateway</a:t>
+                        <a:t>Decisions not to adopt, each with its reason: there is no primary-care registry in the case, no user task iterates a collection, and the case gives the clinical decision to the hospital</a:t>
                       </a:r>
                     </a:p>
                   </a:txBody>
@@ -4711,96 +4711,13 @@
                           </a:solidFill>
                           <a:latin typeface="Segoe UI"/>
                         </a:rPr>
-                        <a:t>DEF-14</a:t>
+                        <a:t>docs/agile/response-to-feedback.md</a:t>
                       </a:r>
                     </a:p>
                   </a:txBody>
                   <a:tcPr marL="64008" marR="45720" marT="18288" marB="18288" anchor="t">
                     <a:solidFill>
                       <a:srgbClr val="F4F7F9"/>
-                    </a:solidFill>
-                  </a:tcPr>
-                </a:tc>
-              </a:tr>
-              <a:tr h="914400">
-                <a:tc>
-                  <a:txBody>
-                    <a:bodyPr wrap="square"/>
-                    <a:lstStyle/>
-                    <a:p>
-                      <a:pPr>
-                        <a:spcAft>
-                          <a:spcPts val="0"/>
-                        </a:spcAft>
-                      </a:pPr>
-                      <a:r>
-                        <a:rPr sz="950" b="0">
-                          <a:solidFill>
-                            <a:srgbClr val="535F6B"/>
-                          </a:solidFill>
-                          <a:latin typeface="Segoe UI"/>
-                        </a:rPr>
-                        <a:t>GP registry validation; multi-instance cardinality; a GP-side rejection</a:t>
-                      </a:r>
-                    </a:p>
-                  </a:txBody>
-                  <a:tcPr marL="64008" marR="45720" marT="18288" marB="18288" anchor="t">
-                    <a:solidFill>
-                      <a:srgbClr val="FFFFFF"/>
-                    </a:solidFill>
-                  </a:tcPr>
-                </a:tc>
-                <a:tc>
-                  <a:txBody>
-                    <a:bodyPr wrap="square"/>
-                    <a:lstStyle/>
-                    <a:p>
-                      <a:pPr>
-                        <a:spcAft>
-                          <a:spcPts val="0"/>
-                        </a:spcAft>
-                      </a:pPr>
-                      <a:r>
-                        <a:rPr sz="950" b="0">
-                          <a:solidFill>
-                            <a:srgbClr val="535F6B"/>
-                          </a:solidFill>
-                          <a:latin typeface="Segoe UI"/>
-                        </a:rPr>
-                        <a:t>Decisions not to adopt, each with its reason: there is no primary-care registry in the case, no user task iterates a collection, and the case gives the clinical decision to the hospital</a:t>
-                      </a:r>
-                    </a:p>
-                  </a:txBody>
-                  <a:tcPr marL="64008" marR="45720" marT="18288" marB="18288" anchor="t">
-                    <a:solidFill>
-                      <a:srgbClr val="FFFFFF"/>
-                    </a:solidFill>
-                  </a:tcPr>
-                </a:tc>
-                <a:tc>
-                  <a:txBody>
-                    <a:bodyPr wrap="square"/>
-                    <a:lstStyle/>
-                    <a:p>
-                      <a:pPr>
-                        <a:spcAft>
-                          <a:spcPts val="0"/>
-                        </a:spcAft>
-                      </a:pPr>
-                      <a:r>
-                        <a:rPr sz="950" b="0">
-                          <a:solidFill>
-                            <a:srgbClr val="535F6B"/>
-                          </a:solidFill>
-                          <a:latin typeface="Segoe UI"/>
-                        </a:rPr>
-                        <a:t>docs/agile/response-to-feedback.md</a:t>
-                      </a:r>
-                    </a:p>
-                  </a:txBody>
-                  <a:tcPr marL="64008" marR="45720" marT="18288" marB="18288" anchor="t">
-                    <a:solidFill>
-                      <a:srgbClr val="FFFFFF"/>
                     </a:solidFill>
                   </a:tcPr>
                 </a:tc>
@@ -7246,7 +7163,7 @@
                 </a:solidFill>
                 <a:latin typeface="Segoe UI"/>
               </a:rPr>
-              <a:t>•  The tests: tests/test-plan.md — criteria (3), scenarios (4), the execution record (5), defects and limitations (6) — and the runs in tests/evidence/, including the three records of 2026-10-15.</a:t>
+              <a:t>•  The tests: tests/test-plan.md — criteria (3), scenarios (4), the execution record (5), defects and limitations (6) — and the runs in tests/evidence/, including the four records of 2026-10-15.</a:t>
             </a:r>
           </a:p>
           <a:p>
@@ -9445,7 +9362,7 @@
         <p:spPr>
           <a:xfrm>
             <a:off x="685800" y="3886200"/>
-            <a:ext cx="10789920" cy="2440420"/>
+            <a:ext cx="10789920" cy="2399853"/>
           </a:xfrm>
           <a:prstGeom prst="rect">
             <a:avLst/>
@@ -10176,7 +10093,7 @@
                 </a:solidFill>
                 <a:latin typeface="Segoe UI"/>
               </a:rPr>
-              <a:t>•  Still open and recorded, not hidden: one condition sits on an activity's only outgoing flow (DEF-14), so it is documentation of intent rather than a guard, and no user is authenticated (DEF-07) or has submitted a form (DEF-08).</a:t>
+              <a:t>•  Still open and recorded, not hidden: no user is authenticated (DEF-07) or has submitted a form (DEF-08); the separation of duties stays structural, and every document says so.</a:t>
             </a:r>
           </a:p>
         </p:txBody>
